--- a/system-design-101/vi/lessons/sd-11-032/slides/sd-11-032.pptx
+++ b/system-design-101/vi/lessons/sd-11-032/slides/sd-11-032.pptx
@@ -3838,7 +3838,7 @@
               <a:t> 202</a:t>
             </a:r>
             <a:r>
-              <a:rPr lang="en-US" sz="2700" b="1" dirty="0" spc="6" kern="0">
+              <a:rPr lang="en-US" sz="2700" b="1" dirty="0" spc="0" kern="0">
                 <a:solidFill>
                   <a:srgbClr val="14161C"/>
                 </a:solidFill>
@@ -3846,10 +3846,10 @@
                 <a:ea typeface="Be Vietnam Pro" pitchFamily="34" charset="-122"/>
                 <a:cs typeface="Be Vietnam Pro" pitchFamily="34" charset="-120"/>
               </a:rPr>
-              <a:t> "đã</a:t>
-            </a:r>
-            <a:r>
-              <a:rPr lang="en-US" sz="2700" b="1" dirty="0" spc="1" kern="0">
+              <a:t> "chấp nhận,</a:t>
+            </a:r>
+            <a:r>
+              <a:rPr lang="en-US" sz="2700" b="1" dirty="0" spc="11" kern="0">
                 <a:solidFill>
                   <a:srgbClr val="14161C"/>
                 </a:solidFill>
@@ -3857,7 +3857,18 @@
                 <a:ea typeface="Be Vietnam Pro" pitchFamily="34" charset="-122"/>
                 <a:cs typeface="Be Vietnam Pro" pitchFamily="34" charset="-120"/>
               </a:rPr>
-              <a:t> nhận"</a:t>
+              <a:t> chưa</a:t>
+            </a:r>
+            <a:r>
+              <a:rPr lang="en-US" sz="2700" b="1" dirty="0" spc="-20" kern="0">
+                <a:solidFill>
+                  <a:srgbClr val="14161C"/>
+                </a:solidFill>
+                <a:latin typeface="Be Vietnam Pro" pitchFamily="34" charset="0"/>
+                <a:ea typeface="Be Vietnam Pro" pitchFamily="34" charset="-122"/>
+                <a:cs typeface="Be Vietnam Pro" pitchFamily="34" charset="-120"/>
+              </a:rPr>
+              <a:t> xong"</a:t>
             </a:r>
             <a:endParaRPr lang="en-US" sz="2700" dirty="0"/>
           </a:p>
@@ -10648,7 +10659,7 @@
               <a:t> là</a:t>
             </a:r>
             <a:r>
-              <a:rPr lang="en-US" sz="2250" dirty="0" spc="12" kern="0">
+              <a:rPr lang="en-US" sz="2250" dirty="0" spc="2" kern="0">
                 <a:solidFill>
                   <a:srgbClr val="E4E1D8"/>
                 </a:solidFill>
@@ -10656,10 +10667,10 @@
                 <a:ea typeface="Be Vietnam Pro" pitchFamily="34" charset="-122"/>
                 <a:cs typeface="Be Vietnam Pro" pitchFamily="34" charset="-120"/>
               </a:rPr>
-              <a:t> "đã</a:t>
-            </a:r>
-            <a:r>
-              <a:rPr lang="en-US" sz="2250" dirty="0" spc="2" kern="0">
+              <a:t> "chấp</a:t>
+            </a:r>
+            <a:r>
+              <a:rPr lang="en-US" sz="2250" dirty="0" spc="-1" kern="0">
                 <a:solidFill>
                   <a:srgbClr val="E4E1D8"/>
                 </a:solidFill>
@@ -10667,7 +10678,29 @@
                 <a:ea typeface="Be Vietnam Pro" pitchFamily="34" charset="-122"/>
                 <a:cs typeface="Be Vietnam Pro" pitchFamily="34" charset="-120"/>
               </a:rPr>
-              <a:t> nhận".</a:t>
+              <a:t> nhận,</a:t>
+            </a:r>
+            <a:r>
+              <a:rPr lang="en-US" sz="2250" dirty="0" spc="7" kern="0">
+                <a:solidFill>
+                  <a:srgbClr val="E4E1D8"/>
+                </a:solidFill>
+                <a:latin typeface="Be Vietnam Pro" pitchFamily="34" charset="0"/>
+                <a:ea typeface="Be Vietnam Pro" pitchFamily="34" charset="-122"/>
+                <a:cs typeface="Be Vietnam Pro" pitchFamily="34" charset="-120"/>
+              </a:rPr>
+              <a:t> chưa</a:t>
+            </a:r>
+            <a:r>
+              <a:rPr lang="en-US" sz="2250" dirty="0" spc="-10" kern="0">
+                <a:solidFill>
+                  <a:srgbClr val="E4E1D8"/>
+                </a:solidFill>
+                <a:latin typeface="Be Vietnam Pro" pitchFamily="34" charset="0"/>
+                <a:ea typeface="Be Vietnam Pro" pitchFamily="34" charset="-122"/>
+                <a:cs typeface="Be Vietnam Pro" pitchFamily="34" charset="-120"/>
+              </a:rPr>
+              <a:t> xong".</a:t>
             </a:r>
             <a:endParaRPr lang="en-US" sz="2250" dirty="0"/>
           </a:p>

--- a/system-design-101/vi/lessons/sd-11-032/slides/sd-11-032.pptx
+++ b/system-design-101/vi/lessons/sd-11-032/slides/sd-11-032.pptx
@@ -6195,7 +6195,7 @@
       </p:sp>
       <p:sp>
         <p:nvSpPr>
-          <p:cNvPr id="9" name="Connector line-1792423262075-278601813"/>
+          <p:cNvPr id="9" name="Connector line-1792424947154-361447637"/>
           <p:cNvSpPr/>
           <p:nvPr/>
         </p:nvSpPr>
@@ -6220,7 +6220,7 @@
       </p:sp>
       <p:sp>
         <p:nvSpPr>
-          <p:cNvPr id="10" name="Connector line-1792423262075-32952497"/>
+          <p:cNvPr id="10" name="Connector line-1792424947154-973608438"/>
           <p:cNvSpPr/>
           <p:nvPr/>
         </p:nvSpPr>
@@ -6245,7 +6245,7 @@
       </p:sp>
       <p:sp>
         <p:nvSpPr>
-          <p:cNvPr id="11" name="Connector line-1792423262076-227927501"/>
+          <p:cNvPr id="11" name="Connector line-1792424947155-432839845"/>
           <p:cNvSpPr/>
           <p:nvPr/>
         </p:nvSpPr>
@@ -6270,7 +6270,7 @@
       </p:sp>
       <p:sp>
         <p:nvSpPr>
-          <p:cNvPr id="12" name="Connector line-1792423262076-432007475"/>
+          <p:cNvPr id="12" name="Connector line-1792424947155-611196761"/>
           <p:cNvSpPr/>
           <p:nvPr/>
         </p:nvSpPr>
@@ -6301,8 +6301,8 @@
         </p:nvSpPr>
         <p:spPr>
           <a:xfrm>
-            <a:off x="914400" y="7905750"/>
-            <a:ext cx="16192500" cy="571500"/>
+            <a:off x="914400" y="7715250"/>
+            <a:ext cx="16192500" cy="1143000"/>
           </a:xfrm>
           <a:prstGeom prst="rect">
             <a:avLst/>
@@ -6318,7 +6318,7 @@
               <a:buNone/>
             </a:pPr>
             <a:r>
-              <a:rPr lang="en-US" sz="2850" dirty="0" spc="-6" kern="0">
+              <a:rPr lang="en-US" sz="2700" dirty="0" spc="10" kern="0">
                 <a:solidFill>
                   <a:srgbClr val="14161C"/>
                 </a:solidFill>
@@ -6326,10 +6326,10 @@
                 <a:ea typeface="Be Vietnam Pro SemiBold" pitchFamily="34" charset="-122"/>
                 <a:cs typeface="Be Vietnam Pro SemiBold" pitchFamily="34" charset="-120"/>
               </a:rPr>
-              <a:t>Mỗi</a:t>
-            </a:r>
-            <a:r>
-              <a:rPr lang="en-US" sz="2850" dirty="0" spc="11" kern="0">
+              <a:t>Bước</a:t>
+            </a:r>
+            <a:r>
+              <a:rPr lang="en-US" sz="2700" dirty="0" spc="5" kern="0">
                 <a:solidFill>
                   <a:srgbClr val="14161C"/>
                 </a:solidFill>
@@ -6337,10 +6337,10 @@
                 <a:ea typeface="Be Vietnam Pro SemiBold" pitchFamily="34" charset="-122"/>
                 <a:cs typeface="Be Vietnam Pro SemiBold" pitchFamily="34" charset="-120"/>
               </a:rPr>
-              <a:t> bước</a:t>
-            </a:r>
-            <a:r>
-              <a:rPr lang="en-US" sz="2850" dirty="0" spc="-2" kern="0">
+              <a:t> trước</a:t>
+            </a:r>
+            <a:r>
+              <a:rPr lang="en-US" sz="2700" dirty="0" spc="15" kern="0">
                 <a:solidFill>
                   <a:srgbClr val="14161C"/>
                 </a:solidFill>
@@ -6348,10 +6348,10 @@
                 <a:ea typeface="Be Vietnam Pro SemiBold" pitchFamily="34" charset="-122"/>
                 <a:cs typeface="Be Vietnam Pro SemiBold" pitchFamily="34" charset="-120"/>
               </a:rPr>
-              <a:t> phải có</a:t>
-            </a:r>
-            <a:r>
-              <a:rPr lang="en-US" sz="2850" dirty="0" spc="-1" kern="0">
+              <a:t> điểm</a:t>
+            </a:r>
+            <a:r>
+              <a:rPr lang="en-US" sz="2700" dirty="0" spc="-6" kern="0">
                 <a:solidFill>
                   <a:srgbClr val="14161C"/>
                 </a:solidFill>
@@ -6359,10 +6359,10 @@
                 <a:ea typeface="Be Vietnam Pro SemiBold" pitchFamily="34" charset="-122"/>
                 <a:cs typeface="Be Vietnam Pro SemiBold" pitchFamily="34" charset="-120"/>
               </a:rPr>
-              <a:t> sẵn thao</a:t>
-            </a:r>
-            <a:r>
-              <a:rPr lang="en-US" sz="2850" dirty="0" spc="-3" kern="0">
+              <a:t> không</a:t>
+            </a:r>
+            <a:r>
+              <a:rPr lang="en-US" sz="2700" dirty="0" spc="-7" kern="0">
                 <a:solidFill>
                   <a:srgbClr val="14161C"/>
                 </a:solidFill>
@@ -6370,10 +6370,10 @@
                 <a:ea typeface="Be Vietnam Pro SemiBold" pitchFamily="34" charset="-122"/>
                 <a:cs typeface="Be Vietnam Pro SemiBold" pitchFamily="34" charset="-120"/>
               </a:rPr>
-              <a:t> tác</a:t>
-            </a:r>
-            <a:r>
-              <a:rPr lang="en-US" sz="2850" dirty="0" spc="2" kern="0">
+              <a:t> quay</a:t>
+            </a:r>
+            <a:r>
+              <a:rPr lang="en-US" sz="2700" dirty="0" spc="-6" kern="0">
                 <a:solidFill>
                   <a:srgbClr val="14161C"/>
                 </a:solidFill>
@@ -6381,9 +6381,108 @@
                 <a:ea typeface="Be Vietnam Pro SemiBold" pitchFamily="34" charset="-122"/>
                 <a:cs typeface="Be Vietnam Pro SemiBold" pitchFamily="34" charset="-120"/>
               </a:rPr>
-              <a:t> bù.</a:t>
-            </a:r>
-            <a:endParaRPr lang="en-US" sz="2850" dirty="0"/>
+              <a:t> lại</a:t>
+            </a:r>
+            <a:r>
+              <a:rPr lang="en-US" sz="2700" dirty="0" spc="-3" kern="0">
+                <a:solidFill>
+                  <a:srgbClr val="14161C"/>
+                </a:solidFill>
+                <a:latin typeface="Be Vietnam Pro SemiBold" pitchFamily="34" charset="0"/>
+                <a:ea typeface="Be Vietnam Pro SemiBold" pitchFamily="34" charset="-122"/>
+                <a:cs typeface="Be Vietnam Pro SemiBold" pitchFamily="34" charset="-120"/>
+              </a:rPr>
+              <a:t> cần thao</a:t>
+            </a:r>
+            <a:r>
+              <a:rPr lang="en-US" sz="2700" dirty="0" spc="-10" kern="0">
+                <a:solidFill>
+                  <a:srgbClr val="14161C"/>
+                </a:solidFill>
+                <a:latin typeface="Be Vietnam Pro SemiBold" pitchFamily="34" charset="0"/>
+                <a:ea typeface="Be Vietnam Pro SemiBold" pitchFamily="34" charset="-122"/>
+                <a:cs typeface="Be Vietnam Pro SemiBold" pitchFamily="34" charset="-120"/>
+              </a:rPr>
+              <a:t> tác</a:t>
+            </a:r>
+            <a:r>
+              <a:rPr lang="en-US" sz="2700" dirty="0" spc="-1" kern="0">
+                <a:solidFill>
+                  <a:srgbClr val="14161C"/>
+                </a:solidFill>
+                <a:latin typeface="Be Vietnam Pro SemiBold" pitchFamily="34" charset="0"/>
+                <a:ea typeface="Be Vietnam Pro SemiBold" pitchFamily="34" charset="-122"/>
+                <a:cs typeface="Be Vietnam Pro SemiBold" pitchFamily="34" charset="-120"/>
+              </a:rPr>
+              <a:t> bù;</a:t>
+            </a:r>
+            <a:r>
+              <a:rPr lang="en-US" sz="2700" dirty="0" spc="8" kern="0">
+                <a:solidFill>
+                  <a:srgbClr val="14161C"/>
+                </a:solidFill>
+                <a:latin typeface="Be Vietnam Pro SemiBold" pitchFamily="34" charset="0"/>
+                <a:ea typeface="Be Vietnam Pro SemiBold" pitchFamily="34" charset="-122"/>
+                <a:cs typeface="Be Vietnam Pro SemiBold" pitchFamily="34" charset="-120"/>
+              </a:rPr>
+              <a:t> bước</a:t>
+            </a:r>
+            <a:r>
+              <a:rPr lang="en-US" sz="2700" dirty="0" spc="-2" kern="0">
+                <a:solidFill>
+                  <a:srgbClr val="14161C"/>
+                </a:solidFill>
+                <a:latin typeface="Be Vietnam Pro SemiBold" pitchFamily="34" charset="0"/>
+                <a:ea typeface="Be Vietnam Pro SemiBold" pitchFamily="34" charset="-122"/>
+                <a:cs typeface="Be Vietnam Pro SemiBold" pitchFamily="34" charset="-120"/>
+              </a:rPr>
+              <a:t> sau</a:t>
+            </a:r>
+            <a:r>
+              <a:rPr lang="en-US" sz="2700" dirty="0" spc="-8" kern="0">
+                <a:solidFill>
+                  <a:srgbClr val="14161C"/>
+                </a:solidFill>
+                <a:latin typeface="Be Vietnam Pro SemiBold" pitchFamily="34" charset="0"/>
+                <a:ea typeface="Be Vietnam Pro SemiBold" pitchFamily="34" charset="-122"/>
+                <a:cs typeface="Be Vietnam Pro SemiBold" pitchFamily="34" charset="-120"/>
+              </a:rPr>
+              <a:t> phải</a:t>
+            </a:r>
+            <a:r>
+              <a:rPr lang="en-US" sz="2700" dirty="0" spc="-2" kern="0">
+                <a:solidFill>
+                  <a:srgbClr val="14161C"/>
+                </a:solidFill>
+                <a:latin typeface="Be Vietnam Pro SemiBold" pitchFamily="34" charset="0"/>
+                <a:ea typeface="Be Vietnam Pro SemiBold" pitchFamily="34" charset="-122"/>
+                <a:cs typeface="Be Vietnam Pro SemiBold" pitchFamily="34" charset="-120"/>
+              </a:rPr>
+              <a:t> thử</a:t>
+            </a:r>
+            <a:r>
+              <a:rPr lang="en-US" sz="2700" dirty="0" spc="-6" kern="0">
+                <a:solidFill>
+                  <a:srgbClr val="14161C"/>
+                </a:solidFill>
+                <a:latin typeface="Be Vietnam Pro SemiBold" pitchFamily="34" charset="0"/>
+                <a:ea typeface="Be Vietnam Pro SemiBold" pitchFamily="34" charset="-122"/>
+                <a:cs typeface="Be Vietnam Pro SemiBold" pitchFamily="34" charset="-120"/>
+              </a:rPr>
+              <a:t> lại</a:t>
+            </a:r>
+            <a:r>
+              <a:rPr lang="en-US" sz="2700" dirty="0" spc="7" kern="0">
+                <a:solidFill>
+                  <a:srgbClr val="14161C"/>
+                </a:solidFill>
+                <a:latin typeface="Be Vietnam Pro SemiBold" pitchFamily="34" charset="0"/>
+                <a:ea typeface="Be Vietnam Pro SemiBold" pitchFamily="34" charset="-122"/>
+                <a:cs typeface="Be Vietnam Pro SemiBold" pitchFamily="34" charset="-120"/>
+              </a:rPr>
+              <a:t> được.</a:t>
+            </a:r>
+            <a:endParaRPr lang="en-US" sz="2700" dirty="0"/>
           </a:p>
         </p:txBody>
       </p:sp>
